--- a/outputs/ophthalmology-batch-20261011/octa/algorithm_editable.pptx
+++ b/outputs/ophthalmology-batch-20261011/octa/algorithm_editable.pptx
@@ -550,7 +550,7 @@
           <a:p/>
           <a:p>
             <a:r>
-              <a:t>octa-04 OCTA采集：PLEX Elite 9000扫频OCTA；黄斑中心6×6-mm扫描。具体质量排除细则见补充材料，当前上传文件未附补充全文。</a:t>
+              <a:t>octa-04 OCTA采集：PLEX Elite 9000扫频OCTA；黄斑中心6 mm × 6 mm扫描。具体质量排除细则见补充材料，当前上传文件未附补充全文。</a:t>
             </a:r>
           </a:p>
           <a:p>
@@ -630,7 +630,7 @@
           <a:p/>
           <a:p>
             <a:r>
-              <a:t>octa-10 AUC不能作诊断阈值：论文未设计或充分赋能来建立临床可操作阈值；没有用于个体诊断的GCC/CCFD/VSD切点、预测时限或用药方案。</a:t>
+              <a:t>octa-10 AUC不能作诊断阈值：研究设计及统计效能不足以建立临床可操作阈值；没有用于个体诊断的GCC/CCFD/VSD切点、预测时限或用药方案。</a:t>
             </a:r>
           </a:p>
           <a:p>
@@ -4201,7 +4201,7 @@
       </p:sp>
       <p:sp>
         <p:nvSpPr>
-          <p:cNvPr id="12" name="ADRC老年研究人群、SS-OCTA 6×6-mm；超出该场景 → 外推有效性未明确。"/>
+          <p:cNvPr id="12" name="ADRC老年研究人群、SS-OCTA 6 mm × 6 mm；超出该场景 → 外推有效性未明确。"/>
           <p:cNvSpPr txBox="1"/>
           <p:nvPr/>
         </p:nvSpPr>
@@ -4241,7 +4241,7 @@
                 <a:ea typeface="Microsoft YaHei"/>
                 <a:cs typeface="Microsoft YaHei"/>
               </a:rPr>
-              <a:t>ADRC老年研究人群、SS-OCTA 6×6-mm；超出该场景</a:t>
+              <a:t>ADRC老年研究人群、SS-OCTA 6 mm × 6 mm；超出</a:t>
             </a:r>
           </a:p>
           <a:p>
@@ -4265,7 +4265,7 @@
                 <a:ea typeface="Microsoft YaHei"/>
                 <a:cs typeface="Microsoft YaHei"/>
               </a:rPr>
-              <a:t>→ 外推有效性未明确。</a:t>
+              <a:t>该场景 → 外推有效性未明确。</a:t>
             </a:r>
           </a:p>
         </p:txBody>
